--- a/slides/notion-proposal.pptx
+++ b/slides/notion-proposal.pptx
@@ -30618,7 +30618,7 @@
                 <a:ea typeface="Meiryo" pitchFamily="34" charset="-122"/>
                 <a:cs typeface="Meiryo" pitchFamily="34" charset="-120"/>
               </a:rPr>
-              <a:t>いずれも「誰が・いつまでに・何を」が一箇所にまとまっていないことから生じています。</a:t>
+              <a:t>いずれも「誰が、いつまでに、何をするのか」が一箇所にまとまっていないことから生じています。</a:t>
             </a:r>
             <a:endParaRPr lang="en-US" sz="1350" dirty="0"/>
           </a:p>

--- a/slides/notion-proposal.pptx
+++ b/slides/notion-proposal.pptx
@@ -1672,7 +1672,8 @@
           <a:p>
             <a:r>
               <a:rPr lang="en-US" dirty="0"/>
-              <a:t>工数は金額換算して合計に足さない。内製なら現金支出は増えず、足せば投資額が膨らんで求められる効果も大きくなる。一方、書かないと「タダでできる」と誤解されるため人月では必ず明示する。</a:t>
+              <a:t>工数を人月で示さず内製である旨の記述に留めたのは、見積もれていない数字を空欄で出すと準備不足に見えるため。「タダでできる」と誤解されないことだけを担保している。
+税区分は公式ページに明記がないため税別として扱っている。契約時に必ず確認すること。承認額が約53万円変わる。</a:t>
             </a:r>
             <a:endParaRPr lang="en-US" dirty="0"/>
           </a:p>
@@ -2024,7 +2025,9 @@
           <a:p>
             <a:r>
               <a:rPr lang="en-US" dirty="0"/>
-              <a:t>このスライドは守りではなく攻め。展望を語ることで『構想がある』と伝わり、同時に『今回はここまで』と自ら線を引くことで、なし崩しに全社システムを乗り換えるのではという警戒を解除できる。上層部が最も嫌う『気づいたら引き返せない』を先回りして潰す1枚。</a:t>
+              <a:t>「展望」ではなく「やらないこと」を明示するスライド。上層部が最も嫌うのは『気づいたら引き返せなくなっていた』状態なので、それを先回りして潰す。
+資料保管のルールはSharePointのドキュメントセット化・タグ運用として別途検討が進行中であり、Notionへ移すかどうかは決まっていない。この提案がそちらの選択肢を狭めないことを明示するため、ここではNotionという語を使わない。
+「では資料はどうするのか」と聞かれたら、別プロジェクトとして検討中であり本提案とは切り離している、と答える。</a:t>
             </a:r>
             <a:endParaRPr lang="en-US" dirty="0"/>
           </a:p>
@@ -2816,7 +2819,9 @@
           <a:p>
             <a:r>
               <a:rPr lang="en-US" dirty="0"/>
-              <a:t>「では人を減らせるのか」と必ず聞かれる。人件費が浮くとは絶対に言わないこと。言えば人員削減の話にすり替わり、現場の協力を失う。</a:t>
+              <a:t>「では人を減らせるのか」と必ず聞かれる。人件費が浮くとは絶対に言わないこと。言えば人員削減の話にすり替わり、現場の協力を失う。
+【数字の根拠を問われたら】Outlookの予定表から抽出することは可能だが、150名分の集計に相応の工数がかかるため、今回は各階層へのヒアリングによる概算としている。精緻な数字が必要であれば別途集計する、と答える。
+【補足として言えること】導入後はNotion上の会議記録から、集計の手間なく実数を把握できるようになる。</a:t>
             </a:r>
             <a:endParaRPr lang="en-US" dirty="0"/>
           </a:p>
@@ -4094,7 +4099,7 @@
                 <a:ea typeface="Meiryo" pitchFamily="34" charset="-122"/>
                 <a:cs typeface="Meiryo" pitchFamily="34" charset="-120"/>
               </a:rPr>
-              <a:t>議事録は Teams上のWord と OneNote に分散。研修資料は Teams と SharePoint に分散している。</a:t>
+              <a:t>保存先が人によって違い、チャットに流れたリンクは時間が経てば遡れない。</a:t>
             </a:r>
             <a:endParaRPr lang="en-US" sz="1200" dirty="0"/>
           </a:p>
@@ -4541,7 +4546,7 @@
                 <a:ea typeface="Meiryo" pitchFamily="34" charset="-122"/>
                 <a:cs typeface="Meiryo" pitchFamily="34" charset="-120"/>
               </a:rPr>
-              <a:t>議事録はTeams上のWordとOneNoteに、研修資料はTeamsとSharePointに分かれている</a:t>
+              <a:t>議事録がTeams上のWordとOneNoteに分かれ、どこに何があるか分からなくなる</a:t>
             </a:r>
             <a:endParaRPr lang="en-US" sz="1150" dirty="0"/>
           </a:p>
@@ -12268,7 +12273,7 @@
                 <a:ea typeface="Meiryo" pitchFamily="34" charset="-122"/>
                 <a:cs typeface="Meiryo" pitchFamily="34" charset="-120"/>
               </a:rPr>
-              <a:t>Businessは最上位ではありません</a:t>
+              <a:t>要件を満たす最小構成は、Businessプランです</a:t>
             </a:r>
             <a:endParaRPr lang="en-US" sz="2700" dirty="0"/>
           </a:p>
@@ -12583,7 +12588,7 @@
                           <a:ea typeface="Meiryo" pitchFamily="34" charset="-122"/>
                           <a:cs typeface="Meiryo" pitchFamily="34" charset="-120"/>
                         </a:rPr>
-                        <a:t>月額（1人・年払い）</a:t>
+                        <a:t>月額（1人・年払い／税別）</a:t>
                       </a:r>
                       <a:endParaRPr lang="en-US" sz="1100" dirty="0">
                         <a:latin typeface="Meiryo" charset="0"/>
@@ -12857,7 +12862,7 @@
                           <a:ea typeface="Meiryo" pitchFamily="34" charset="-122"/>
                           <a:cs typeface="Meiryo" pitchFamily="34" charset="-120"/>
                         </a:rPr>
-                        <a:t>年間費用（140名）</a:t>
+                        <a:t>年間費用（140名／税別）</a:t>
                       </a:r>
                       <a:endParaRPr lang="en-US" sz="1100" dirty="0">
                         <a:latin typeface="Meiryo" charset="0"/>
@@ -15500,7 +15505,7 @@
                 <a:ea typeface="Meiryo" pitchFamily="34" charset="-122"/>
                 <a:cs typeface="Meiryo" pitchFamily="34" charset="-120"/>
               </a:rPr>
-              <a:t>年間費用 529.2万円 のご承認</a:t>
+              <a:t>年間費用 529.2万円（税別）のご承認</a:t>
             </a:r>
             <a:endParaRPr lang="en-US" sz="1800" dirty="0"/>
           </a:p>
@@ -16190,7 +16195,7 @@
                           <a:ea typeface="Meiryo" pitchFamily="34" charset="-122"/>
                           <a:cs typeface="Meiryo" pitchFamily="34" charset="-120"/>
                         </a:rPr>
-                        <a:t>年間費用（140名・年払い）</a:t>
+                        <a:t>年間費用（140名・年払い／税別）</a:t>
                       </a:r>
                       <a:endParaRPr lang="en-US" sz="1200" dirty="0">
                         <a:latin typeface="Meiryo" charset="0"/>
@@ -18070,7 +18075,7 @@
         </p:nvSpPr>
         <p:spPr>
           <a:xfrm>
-            <a:off x="969264" y="1810512"/>
+            <a:off x="969264" y="1792224"/>
             <a:ext cx="5029200" cy="274320"/>
           </a:xfrm>
           <a:prstGeom prst="rect">
@@ -18095,7 +18100,7 @@
                 <a:ea typeface="Meiryo" pitchFamily="34" charset="-122"/>
                 <a:cs typeface="Meiryo" pitchFamily="34" charset="-120"/>
               </a:rPr>
-              <a:t>年間ライセンス費用</a:t>
+              <a:t>年間ライセンス費用（税別）</a:t>
             </a:r>
             <a:endParaRPr lang="en-US" sz="1200" dirty="0"/>
           </a:p>
@@ -18109,7 +18114,7 @@
         </p:nvSpPr>
         <p:spPr>
           <a:xfrm>
-            <a:off x="969264" y="2194560"/>
+            <a:off x="969264" y="2139696"/>
             <a:ext cx="5029200" cy="749808"/>
           </a:xfrm>
           <a:prstGeom prst="rect">
@@ -18148,7 +18153,7 @@
         </p:nvSpPr>
         <p:spPr>
           <a:xfrm>
-            <a:off x="969264" y="3127248"/>
+            <a:off x="969264" y="2962656"/>
             <a:ext cx="5029200" cy="292608"/>
           </a:xfrm>
           <a:prstGeom prst="rect">
@@ -18181,7 +18186,46 @@
       </p:sp>
       <p:sp>
         <p:nvSpPr>
-          <p:cNvPr id="8" name="Shape 6"/>
+          <p:cNvPr id="8" name="Text 6"/>
+          <p:cNvSpPr/>
+          <p:nvPr/>
+        </p:nvSpPr>
+        <p:spPr>
+          <a:xfrm>
+            <a:off x="969264" y="3310128"/>
+            <a:ext cx="5029200" cy="292608"/>
+          </a:xfrm>
+          <a:prstGeom prst="rect">
+            <a:avLst/>
+          </a:prstGeom>
+          <a:noFill/>
+          <a:ln/>
+        </p:spPr>
+        <p:txBody>
+          <a:bodyPr wrap="square" lIns="0" tIns="0" rIns="0" bIns="0" rtlCol="0" anchor="ctr"/>
+          <a:lstStyle/>
+          <a:p>
+            <a:pPr indent="0" marL="0">
+              <a:buNone/>
+            </a:pPr>
+            <a:r>
+              <a:rPr lang="en-US" sz="1200" b="1" dirty="0">
+                <a:solidFill>
+                  <a:srgbClr val="E8A33D"/>
+                </a:solidFill>
+                <a:latin typeface="Meiryo" pitchFamily="34" charset="0"/>
+                <a:ea typeface="Meiryo" pitchFamily="34" charset="-122"/>
+                <a:cs typeface="Meiryo" pitchFamily="34" charset="-120"/>
+              </a:rPr>
+              <a:t>消費税10%を加えた場合　582.1万円</a:t>
+            </a:r>
+            <a:endParaRPr lang="en-US" sz="1200" dirty="0"/>
+          </a:p>
+        </p:txBody>
+      </p:sp>
+      <p:sp>
+        <p:nvSpPr>
+          <p:cNvPr id="9" name="Shape 7"/>
           <p:cNvSpPr/>
           <p:nvPr/>
         </p:nvSpPr>
@@ -18210,7 +18254,7 @@
       </p:sp>
       <p:sp>
         <p:nvSpPr>
-          <p:cNvPr id="9" name="Text 7"/>
+          <p:cNvPr id="10" name="Text 8"/>
           <p:cNvSpPr/>
           <p:nvPr/>
         </p:nvSpPr>
@@ -18241,7 +18285,7 @@
                 <a:ea typeface="Meiryo" pitchFamily="34" charset="-122"/>
                 <a:cs typeface="Meiryo" pitchFamily="34" charset="-120"/>
               </a:rPr>
-              <a:t>社内工数（現金支出なし）</a:t>
+              <a:t>実施体制（現金支出なし）</a:t>
             </a:r>
             <a:endParaRPr lang="en-US" sz="1250" dirty="0"/>
           </a:p>
@@ -18249,14 +18293,132 @@
       </p:sp>
       <p:sp>
         <p:nvSpPr>
-          <p:cNvPr id="10" name="Text 8"/>
-          <p:cNvSpPr/>
-          <p:nvPr/>
-        </p:nvSpPr>
-        <p:spPr>
-          <a:xfrm>
-            <a:off x="7050024" y="2212848"/>
-            <a:ext cx="3383280" cy="512064"/>
+          <p:cNvPr id="11" name="Shape 9"/>
+          <p:cNvSpPr/>
+          <p:nvPr/>
+        </p:nvSpPr>
+        <p:spPr>
+          <a:xfrm>
+            <a:off x="7086600" y="2331720"/>
+            <a:ext cx="109728" cy="109728"/>
+          </a:xfrm>
+          <a:prstGeom prst="ellipse">
+            <a:avLst/>
+          </a:prstGeom>
+          <a:solidFill>
+            <a:srgbClr val="2C5F8D"/>
+          </a:solidFill>
+          <a:ln/>
+        </p:spPr>
+      </p:sp>
+      <p:sp>
+        <p:nvSpPr>
+          <p:cNvPr id="12" name="Text 10"/>
+          <p:cNvSpPr/>
+          <p:nvPr/>
+        </p:nvSpPr>
+        <p:spPr>
+          <a:xfrm>
+            <a:off x="7324344" y="2231136"/>
+            <a:ext cx="4206240" cy="310896"/>
+          </a:xfrm>
+          <a:prstGeom prst="rect">
+            <a:avLst/>
+          </a:prstGeom>
+          <a:noFill/>
+          <a:ln/>
+        </p:spPr>
+        <p:txBody>
+          <a:bodyPr wrap="square" lIns="0" tIns="0" rIns="0" bIns="0" rtlCol="0" anchor="ctr"/>
+          <a:lstStyle/>
+          <a:p>
+            <a:pPr indent="0" marL="0">
+              <a:buNone/>
+            </a:pPr>
+            <a:r>
+              <a:rPr lang="en-US" sz="1150" dirty="0">
+                <a:solidFill>
+                  <a:srgbClr val="1A1F2B"/>
+                </a:solidFill>
+                <a:latin typeface="Meiryo" pitchFamily="34" charset="0"/>
+                <a:ea typeface="Meiryo" pitchFamily="34" charset="-122"/>
+                <a:cs typeface="Meiryo" pitchFamily="34" charset="-120"/>
+              </a:rPr>
+              <a:t>初期構築（テンプレート設計・データベース構築）</a:t>
+            </a:r>
+            <a:endParaRPr lang="en-US" sz="1150" dirty="0"/>
+          </a:p>
+        </p:txBody>
+      </p:sp>
+      <p:sp>
+        <p:nvSpPr>
+          <p:cNvPr id="13" name="Shape 11"/>
+          <p:cNvSpPr/>
+          <p:nvPr/>
+        </p:nvSpPr>
+        <p:spPr>
+          <a:xfrm>
+            <a:off x="7086600" y="2734056"/>
+            <a:ext cx="109728" cy="109728"/>
+          </a:xfrm>
+          <a:prstGeom prst="ellipse">
+            <a:avLst/>
+          </a:prstGeom>
+          <a:solidFill>
+            <a:srgbClr val="2C5F8D"/>
+          </a:solidFill>
+          <a:ln/>
+        </p:spPr>
+      </p:sp>
+      <p:sp>
+        <p:nvSpPr>
+          <p:cNvPr id="14" name="Text 12"/>
+          <p:cNvSpPr/>
+          <p:nvPr/>
+        </p:nvSpPr>
+        <p:spPr>
+          <a:xfrm>
+            <a:off x="7324344" y="2633472"/>
+            <a:ext cx="4206240" cy="310896"/>
+          </a:xfrm>
+          <a:prstGeom prst="rect">
+            <a:avLst/>
+          </a:prstGeom>
+          <a:noFill/>
+          <a:ln/>
+        </p:spPr>
+        <p:txBody>
+          <a:bodyPr wrap="square" lIns="0" tIns="0" rIns="0" bIns="0" rtlCol="0" anchor="ctr"/>
+          <a:lstStyle/>
+          <a:p>
+            <a:pPr indent="0" marL="0">
+              <a:buNone/>
+            </a:pPr>
+            <a:r>
+              <a:rPr lang="en-US" sz="1150" dirty="0">
+                <a:solidFill>
+                  <a:srgbClr val="1A1F2B"/>
+                </a:solidFill>
+                <a:latin typeface="Meiryo" pitchFamily="34" charset="0"/>
+                <a:ea typeface="Meiryo" pitchFamily="34" charset="-122"/>
+                <a:cs typeface="Meiryo" pitchFamily="34" charset="-120"/>
+              </a:rPr>
+              <a:t>教育・定着支援（説明会・マニュアル・3か月の伴走）</a:t>
+            </a:r>
+            <a:endParaRPr lang="en-US" sz="1150" dirty="0"/>
+          </a:p>
+        </p:txBody>
+      </p:sp>
+      <p:sp>
+        <p:nvSpPr>
+          <p:cNvPr id="15" name="Text 13"/>
+          <p:cNvSpPr/>
+          <p:nvPr/>
+        </p:nvSpPr>
+        <p:spPr>
+          <a:xfrm>
+            <a:off x="7050024" y="3127248"/>
+            <a:ext cx="4480560" cy="566928"/>
           </a:xfrm>
           <a:prstGeom prst="rect">
             <a:avLst/>
@@ -18270,51 +18432,12 @@
           <a:p>
             <a:pPr indent="0" marL="0">
               <a:lnSpc>
-                <a:spcPts val="1600"/>
+                <a:spcPts val="1900"/>
               </a:lnSpc>
               <a:buNone/>
             </a:pPr>
             <a:r>
-              <a:rPr lang="en-US" sz="1100" dirty="0">
-                <a:solidFill>
-                  <a:srgbClr val="5A6472"/>
-                </a:solidFill>
-                <a:latin typeface="Meiryo" pitchFamily="34" charset="0"/>
-                <a:ea typeface="Meiryo" pitchFamily="34" charset="-122"/>
-                <a:cs typeface="Meiryo" pitchFamily="34" charset="-120"/>
-              </a:rPr>
-              <a:t>初期構築（テンプレート設計・DB構築）</a:t>
-            </a:r>
-            <a:endParaRPr lang="en-US" sz="1100" dirty="0"/>
-          </a:p>
-        </p:txBody>
-      </p:sp>
-      <p:sp>
-        <p:nvSpPr>
-          <p:cNvPr id="11" name="Text 9"/>
-          <p:cNvSpPr/>
-          <p:nvPr/>
-        </p:nvSpPr>
-        <p:spPr>
-          <a:xfrm>
-            <a:off x="10442448" y="2212848"/>
-            <a:ext cx="1097280" cy="512064"/>
-          </a:xfrm>
-          <a:prstGeom prst="rect">
-            <a:avLst/>
-          </a:prstGeom>
-          <a:noFill/>
-          <a:ln/>
-        </p:spPr>
-        <p:txBody>
-          <a:bodyPr wrap="square" lIns="0" tIns="0" rIns="0" bIns="0" rtlCol="0" anchor="ctr"/>
-          <a:lstStyle/>
-          <a:p>
-            <a:pPr algn="r" indent="0" marL="0">
-              <a:buNone/>
-            </a:pPr>
-            <a:r>
-              <a:rPr lang="en-US" sz="1300" b="1" dirty="0">
+              <a:rPr lang="en-US" sz="1200" b="1" dirty="0">
                 <a:solidFill>
                   <a:srgbClr val="16233F"/>
                 </a:solidFill>
@@ -18322,80 +18445,19 @@
                 <a:ea typeface="Meiryo" pitchFamily="34" charset="-122"/>
                 <a:cs typeface="Meiryo" pitchFamily="34" charset="-120"/>
               </a:rPr>
-              <a:t>◯人月</a:t>
-            </a:r>
-            <a:endParaRPr lang="en-US" sz="1300" dirty="0"/>
-          </a:p>
-        </p:txBody>
-      </p:sp>
-      <p:sp>
-        <p:nvSpPr>
-          <p:cNvPr id="12" name="Text 10"/>
-          <p:cNvSpPr/>
-          <p:nvPr/>
-        </p:nvSpPr>
-        <p:spPr>
-          <a:xfrm>
-            <a:off x="7050024" y="2779776"/>
-            <a:ext cx="3383280" cy="512064"/>
-          </a:xfrm>
-          <a:prstGeom prst="rect">
-            <a:avLst/>
-          </a:prstGeom>
-          <a:noFill/>
-          <a:ln/>
-        </p:spPr>
-        <p:txBody>
-          <a:bodyPr wrap="square" lIns="0" tIns="0" rIns="0" bIns="0" rtlCol="0" anchor="ctr"/>
-          <a:lstStyle/>
+              <a:t>いずれも人事組織とPMOが内製で担当します。</a:t>
+            </a:r>
+            <a:endParaRPr lang="en-US" sz="1200" dirty="0"/>
+          </a:p>
           <a:p>
             <a:pPr indent="0" marL="0">
               <a:lnSpc>
-                <a:spcPts val="1600"/>
+                <a:spcPts val="1900"/>
               </a:lnSpc>
               <a:buNone/>
             </a:pPr>
             <a:r>
-              <a:rPr lang="en-US" sz="1100" dirty="0">
-                <a:solidFill>
-                  <a:srgbClr val="5A6472"/>
-                </a:solidFill>
-                <a:latin typeface="Meiryo" pitchFamily="34" charset="0"/>
-                <a:ea typeface="Meiryo" pitchFamily="34" charset="-122"/>
-                <a:cs typeface="Meiryo" pitchFamily="34" charset="-120"/>
-              </a:rPr>
-              <a:t>教育・定着支援（説明会・3か月伴走）</a:t>
-            </a:r>
-            <a:endParaRPr lang="en-US" sz="1100" dirty="0"/>
-          </a:p>
-        </p:txBody>
-      </p:sp>
-      <p:sp>
-        <p:nvSpPr>
-          <p:cNvPr id="13" name="Text 11"/>
-          <p:cNvSpPr/>
-          <p:nvPr/>
-        </p:nvSpPr>
-        <p:spPr>
-          <a:xfrm>
-            <a:off x="10442448" y="2779776"/>
-            <a:ext cx="1097280" cy="512064"/>
-          </a:xfrm>
-          <a:prstGeom prst="rect">
-            <a:avLst/>
-          </a:prstGeom>
-          <a:noFill/>
-          <a:ln/>
-        </p:spPr>
-        <p:txBody>
-          <a:bodyPr wrap="square" lIns="0" tIns="0" rIns="0" bIns="0" rtlCol="0" anchor="ctr"/>
-          <a:lstStyle/>
-          <a:p>
-            <a:pPr algn="r" indent="0" marL="0">
-              <a:buNone/>
-            </a:pPr>
-            <a:r>
-              <a:rPr lang="en-US" sz="1300" b="1" dirty="0">
+              <a:rPr lang="en-US" sz="1200" b="1" dirty="0">
                 <a:solidFill>
                   <a:srgbClr val="16233F"/>
                 </a:solidFill>
@@ -18403,57 +18465,15 @@
                 <a:ea typeface="Meiryo" pitchFamily="34" charset="-122"/>
                 <a:cs typeface="Meiryo" pitchFamily="34" charset="-120"/>
               </a:rPr>
-              <a:t>◯人月</a:t>
-            </a:r>
-            <a:endParaRPr lang="en-US" sz="1300" dirty="0"/>
-          </a:p>
-        </p:txBody>
-      </p:sp>
-      <p:sp>
-        <p:nvSpPr>
-          <p:cNvPr id="14" name="Text 12"/>
-          <p:cNvSpPr/>
-          <p:nvPr/>
-        </p:nvSpPr>
-        <p:spPr>
-          <a:xfrm>
-            <a:off x="7050024" y="3438144"/>
-            <a:ext cx="4480560" cy="457200"/>
-          </a:xfrm>
-          <a:prstGeom prst="rect">
-            <a:avLst/>
-          </a:prstGeom>
-          <a:noFill/>
-          <a:ln/>
-        </p:spPr>
-        <p:txBody>
-          <a:bodyPr wrap="square" lIns="0" tIns="0" rIns="0" bIns="0" rtlCol="0" anchor="ctr"/>
-          <a:lstStyle/>
-          <a:p>
-            <a:pPr indent="0" marL="0">
-              <a:lnSpc>
-                <a:spcPts val="1500"/>
-              </a:lnSpc>
-              <a:buNone/>
-            </a:pPr>
-            <a:r>
-              <a:rPr lang="en-US" sz="1050" dirty="0">
-                <a:solidFill>
-                  <a:srgbClr val="5A6472"/>
-                </a:solidFill>
-                <a:latin typeface="Meiryo" pitchFamily="34" charset="0"/>
-                <a:ea typeface="Meiryo" pitchFamily="34" charset="-122"/>
-                <a:cs typeface="Meiryo" pitchFamily="34" charset="-120"/>
-              </a:rPr>
-              <a:t>いずれも内製。PMO・人事組織の立ち上げ業務の一部として実施し、新規採用は行いません。</a:t>
-            </a:r>
-            <a:endParaRPr lang="en-US" sz="1050" dirty="0"/>
-          </a:p>
-        </p:txBody>
-      </p:sp>
-      <p:sp>
-        <p:nvSpPr>
-          <p:cNvPr id="15" name="Shape 13"/>
+              <a:t>新規採用は行いません。</a:t>
+            </a:r>
+            <a:endParaRPr lang="en-US" sz="1200" dirty="0"/>
+          </a:p>
+        </p:txBody>
+      </p:sp>
+      <p:sp>
+        <p:nvSpPr>
+          <p:cNvPr id="16" name="Shape 14"/>
           <p:cNvSpPr/>
           <p:nvPr/>
         </p:nvSpPr>
@@ -18482,7 +18502,7 @@
       </p:sp>
       <p:sp>
         <p:nvSpPr>
-          <p:cNvPr id="16" name="Text 14"/>
+          <p:cNvPr id="17" name="Text 15"/>
           <p:cNvSpPr/>
           <p:nvPr/>
         </p:nvSpPr>
@@ -18521,7 +18541,7 @@
       </p:sp>
       <p:sp>
         <p:nvSpPr>
-          <p:cNvPr id="17" name="Text 15"/>
+          <p:cNvPr id="18" name="Text 16"/>
           <p:cNvSpPr/>
           <p:nvPr/>
         </p:nvSpPr>
@@ -18560,7 +18580,7 @@
       </p:sp>
       <p:sp>
         <p:nvSpPr>
-          <p:cNvPr id="18" name="Shape 16"/>
+          <p:cNvPr id="19" name="Shape 17"/>
           <p:cNvSpPr/>
           <p:nvPr/>
         </p:nvSpPr>
@@ -18589,7 +18609,7 @@
       </p:sp>
       <p:sp>
         <p:nvSpPr>
-          <p:cNvPr id="19" name="Text 17"/>
+          <p:cNvPr id="20" name="Text 18"/>
           <p:cNvSpPr/>
           <p:nvPr/>
         </p:nvSpPr>
@@ -18730,7 +18750,7 @@
                 <a:ea typeface="Meiryo" pitchFamily="34" charset="-122"/>
                 <a:cs typeface="Meiryo" pitchFamily="34" charset="-120"/>
               </a:rPr>
-              <a:t>会議時間の削減だけで、投資額の約3.7倍の効果を見込みます</a:t>
+              <a:t>会議時間の削減だけで、投資額の約2.7倍の効果を見込みます</a:t>
             </a:r>
             <a:endParaRPr lang="en-US" sz="2700" dirty="0"/>
           </a:p>
@@ -18879,7 +18899,7 @@
                 <a:ea typeface="Meiryo" pitchFamily="34" charset="-122"/>
                 <a:cs typeface="Meiryo" pitchFamily="34" charset="-120"/>
               </a:rPr>
-              <a:t>年間ライセンス費用</a:t>
+              <a:t>年間ライセンス費用（税別）</a:t>
             </a:r>
             <a:endParaRPr lang="en-US" sz="1100" dirty="0"/>
           </a:p>
@@ -18986,7 +19006,7 @@
                 <a:ea typeface="Meiryo" pitchFamily="34" charset="-122"/>
                 <a:cs typeface="Meiryo" pitchFamily="34" charset="-120"/>
               </a:rPr>
-              <a:t>約1,980万円</a:t>
+              <a:t>約1,420万円</a:t>
             </a:r>
             <a:endParaRPr lang="en-US" sz="2800" dirty="0"/>
           </a:p>
@@ -19135,7 +19155,7 @@
                 <a:ea typeface="Meiryo" pitchFamily="34" charset="-122"/>
                 <a:cs typeface="Meiryo" pitchFamily="34" charset="-120"/>
               </a:rPr>
-              <a:t>約3.7倍</a:t>
+              <a:t>約2.7倍</a:t>
             </a:r>
             <a:endParaRPr lang="en-US" sz="3000" dirty="0"/>
           </a:p>
@@ -22647,7 +22667,7 @@
                 <a:ea typeface="Meiryo" pitchFamily="34" charset="-122"/>
                 <a:cs typeface="Meiryo" pitchFamily="34" charset="-120"/>
               </a:rPr>
-              <a:t>中長期の構想</a:t>
+              <a:t>対象範囲</a:t>
             </a:r>
             <a:endParaRPr lang="en-US" sz="1150" dirty="0"/>
           </a:p>
@@ -22686,7 +22706,7 @@
                 <a:ea typeface="Meiryo" pitchFamily="34" charset="-122"/>
                 <a:cs typeface="Meiryo" pitchFamily="34" charset="-120"/>
               </a:rPr>
-              <a:t>今後の展望 ― ただし、今回は範囲を絞ります</a:t>
+              <a:t>今回のスコープ ― やること／やらないこと</a:t>
             </a:r>
             <a:endParaRPr lang="en-US" sz="2700" dirty="0"/>
           </a:p>
@@ -22725,7 +22745,7 @@
                 <a:ea typeface="Meiryo" pitchFamily="34" charset="-122"/>
                 <a:cs typeface="Meiryo" pitchFamily="34" charset="-120"/>
               </a:rPr>
-              <a:t>今回のスコープ</a:t>
+              <a:t>今回ご承認いただきたい範囲</a:t>
             </a:r>
             <a:endParaRPr lang="en-US" sz="1150" dirty="0"/>
           </a:p>
@@ -22740,7 +22760,7 @@
         <p:spPr>
           <a:xfrm>
             <a:off x="566928" y="1938528"/>
-            <a:ext cx="4114800" cy="786384"/>
+            <a:ext cx="4480560" cy="786384"/>
           </a:xfrm>
           <a:prstGeom prst="roundRect">
             <a:avLst>
@@ -22769,7 +22789,7 @@
         <p:spPr>
           <a:xfrm>
             <a:off x="877824" y="1938528"/>
-            <a:ext cx="3657600" cy="786384"/>
+            <a:ext cx="4023360" cy="786384"/>
           </a:xfrm>
           <a:prstGeom prst="rect">
             <a:avLst/>
@@ -22808,7 +22828,7 @@
         <p:spPr>
           <a:xfrm>
             <a:off x="566928" y="2834640"/>
-            <a:ext cx="4114800" cy="786384"/>
+            <a:ext cx="4480560" cy="786384"/>
           </a:xfrm>
           <a:prstGeom prst="roundRect">
             <a:avLst>
@@ -22837,7 +22857,7 @@
         <p:spPr>
           <a:xfrm>
             <a:off x="877824" y="2834640"/>
-            <a:ext cx="3657600" cy="786384"/>
+            <a:ext cx="4023360" cy="786384"/>
           </a:xfrm>
           <a:prstGeom prst="rect">
             <a:avLst/>
@@ -22861,7 +22881,7 @@
                 <a:ea typeface="Meiryo" pitchFamily="34" charset="-122"/>
                 <a:cs typeface="Meiryo" pitchFamily="34" charset="-120"/>
               </a:rPr>
-              <a:t>②　議事録・会議</a:t>
+              <a:t>②　議事録・会議運営</a:t>
             </a:r>
             <a:endParaRPr lang="en-US" sz="1700" dirty="0"/>
           </a:p>
@@ -22876,7 +22896,7 @@
         <p:spPr>
           <a:xfrm>
             <a:off x="566928" y="3749040"/>
-            <a:ext cx="4114800" cy="274320"/>
+            <a:ext cx="4480560" cy="274320"/>
           </a:xfrm>
           <a:prstGeom prst="rect">
             <a:avLst/>
@@ -22894,72 +22914,52 @@
             <a:r>
               <a:rPr lang="en-US" sz="1100" b="1" dirty="0">
                 <a:solidFill>
+                  <a:srgbClr val="16233F"/>
+                </a:solidFill>
+                <a:latin typeface="Meiryo" pitchFamily="34" charset="0"/>
+                <a:ea typeface="Meiryo" pitchFamily="34" charset="-122"/>
+                <a:cs typeface="Meiryo" pitchFamily="34" charset="-120"/>
+              </a:rPr>
+              <a:t>やること</a:t>
+            </a:r>
+            <a:endParaRPr lang="en-US" sz="1100" dirty="0"/>
+          </a:p>
+        </p:txBody>
+      </p:sp>
+      <p:sp>
+        <p:nvSpPr>
+          <p:cNvPr id="10" name="Text 8"/>
+          <p:cNvSpPr/>
+          <p:nvPr/>
+        </p:nvSpPr>
+        <p:spPr>
+          <a:xfrm>
+            <a:off x="5687568" y="1609344"/>
+            <a:ext cx="6172200" cy="274320"/>
+          </a:xfrm>
+          <a:prstGeom prst="rect">
+            <a:avLst/>
+          </a:prstGeom>
+          <a:noFill/>
+          <a:ln/>
+        </p:spPr>
+        <p:txBody>
+          <a:bodyPr wrap="square" lIns="0" tIns="0" rIns="0" bIns="0" rtlCol="0" anchor="ctr"/>
+          <a:lstStyle/>
+          <a:p>
+            <a:pPr indent="0" marL="0">
+              <a:buNone/>
+            </a:pPr>
+            <a:r>
+              <a:rPr lang="en-US" sz="1150" b="1" dirty="0">
+                <a:solidFill>
                   <a:srgbClr val="5A6472"/>
                 </a:solidFill>
                 <a:latin typeface="Meiryo" pitchFamily="34" charset="0"/>
                 <a:ea typeface="Meiryo" pitchFamily="34" charset="-122"/>
                 <a:cs typeface="Meiryo" pitchFamily="34" charset="-120"/>
               </a:rPr>
-              <a:t>まずここだけ</a:t>
-            </a:r>
-            <a:endParaRPr lang="en-US" sz="1100" dirty="0"/>
-          </a:p>
-        </p:txBody>
-      </p:sp>
-      <p:sp>
-        <p:nvSpPr>
-          <p:cNvPr id="10" name="Shape 8"/>
-          <p:cNvSpPr/>
-          <p:nvPr/>
-        </p:nvSpPr>
-        <p:spPr>
-          <a:xfrm>
-            <a:off x="4937760" y="2542032"/>
-            <a:ext cx="457200" cy="310896"/>
-          </a:xfrm>
-          <a:prstGeom prst="rightArrow">
-            <a:avLst/>
-          </a:prstGeom>
-          <a:solidFill>
-            <a:srgbClr val="D5DCE6"/>
-          </a:solidFill>
-          <a:ln/>
-        </p:spPr>
-      </p:sp>
-      <p:sp>
-        <p:nvSpPr>
-          <p:cNvPr id="11" name="Text 9"/>
-          <p:cNvSpPr/>
-          <p:nvPr/>
-        </p:nvSpPr>
-        <p:spPr>
-          <a:xfrm>
-            <a:off x="5687568" y="1609344"/>
-            <a:ext cx="4937760" cy="274320"/>
-          </a:xfrm>
-          <a:prstGeom prst="rect">
-            <a:avLst/>
-          </a:prstGeom>
-          <a:noFill/>
-          <a:ln/>
-        </p:spPr>
-        <p:txBody>
-          <a:bodyPr wrap="square" lIns="0" tIns="0" rIns="0" bIns="0" rtlCol="0" anchor="ctr"/>
-          <a:lstStyle/>
-          <a:p>
-            <a:pPr indent="0" marL="0">
-              <a:buNone/>
-            </a:pPr>
-            <a:r>
-              <a:rPr lang="en-US" sz="1150" b="1" dirty="0">
-                <a:solidFill>
-                  <a:srgbClr val="5A6472"/>
-                </a:solidFill>
-                <a:latin typeface="Meiryo" pitchFamily="34" charset="0"/>
-                <a:ea typeface="Meiryo" pitchFamily="34" charset="-122"/>
-                <a:cs typeface="Meiryo" pitchFamily="34" charset="-120"/>
-              </a:rPr>
-              <a:t>将来の構想</a:t>
+              <a:t>今回は対象に含めないもの</a:t>
             </a:r>
             <a:endParaRPr lang="en-US" sz="1150" dirty="0"/>
           </a:p>
@@ -22967,7 +22967,7 @@
       </p:sp>
       <p:sp>
         <p:nvSpPr>
-          <p:cNvPr id="12" name="Shape 10"/>
+          <p:cNvPr id="11" name="Shape 9"/>
           <p:cNvSpPr/>
           <p:nvPr/>
         </p:nvSpPr>
@@ -22994,7 +22994,7 @@
       </p:sp>
       <p:sp>
         <p:nvSpPr>
-          <p:cNvPr id="13" name="Text 11"/>
+          <p:cNvPr id="12" name="Text 10"/>
           <p:cNvSpPr/>
           <p:nvPr/>
         </p:nvSpPr>
@@ -23025,7 +23025,7 @@
                 <a:ea typeface="Meiryo" pitchFamily="34" charset="-122"/>
                 <a:cs typeface="Meiryo" pitchFamily="34" charset="-120"/>
               </a:rPr>
-              <a:t>③　社内ナレッジの移行</a:t>
+              <a:t>③　研修資料・ナレッジの保管</a:t>
             </a:r>
             <a:endParaRPr lang="en-US" sz="1700" dirty="0"/>
           </a:p>
@@ -23033,7 +23033,7 @@
       </p:sp>
       <p:sp>
         <p:nvSpPr>
-          <p:cNvPr id="14" name="Text 12"/>
+          <p:cNvPr id="13" name="Text 11"/>
           <p:cNvSpPr/>
           <p:nvPr/>
         </p:nvSpPr>
@@ -23067,7 +23067,7 @@
                 <a:ea typeface="Meiryo" pitchFamily="34" charset="-122"/>
                 <a:cs typeface="Meiryo" pitchFamily="34" charset="-120"/>
               </a:rPr>
-              <a:t>現在SharePointに集約しているナレッジをNotionに統合し、</a:t>
+              <a:t>SharePointでの管理方法（ドキュメントセット化・タグ運用）を</a:t>
             </a:r>
             <a:endParaRPr lang="en-US" sz="1200" dirty="0"/>
           </a:p>
@@ -23087,7 +23087,7 @@
                 <a:ea typeface="Meiryo" pitchFamily="34" charset="-122"/>
                 <a:cs typeface="Meiryo" pitchFamily="34" charset="-120"/>
               </a:rPr>
-              <a:t>案件・議事録・ナレッジが1か所で繋がる状態を目指したい。</a:t>
+              <a:t>別途検討中です。本提案とは切り離して進めます。</a:t>
             </a:r>
             <a:endParaRPr lang="en-US" sz="1200" dirty="0"/>
           </a:p>
@@ -23095,7 +23095,7 @@
       </p:sp>
       <p:sp>
         <p:nvSpPr>
-          <p:cNvPr id="15" name="Text 13"/>
+          <p:cNvPr id="14" name="Text 12"/>
           <p:cNvSpPr/>
           <p:nvPr/>
         </p:nvSpPr>
@@ -23126,7 +23126,7 @@
                 <a:ea typeface="Meiryo" pitchFamily="34" charset="-122"/>
                 <a:cs typeface="Meiryo" pitchFamily="34" charset="-120"/>
               </a:rPr>
-              <a:t>今回は実施しません</a:t>
+              <a:t>やらないこと</a:t>
             </a:r>
             <a:endParaRPr lang="en-US" sz="1100" dirty="0"/>
           </a:p>
@@ -23134,7 +23134,7 @@
       </p:sp>
       <p:sp>
         <p:nvSpPr>
-          <p:cNvPr id="16" name="Text 14"/>
+          <p:cNvPr id="15" name="Text 13"/>
           <p:cNvSpPr/>
           <p:nvPr/>
         </p:nvSpPr>
@@ -23165,7 +23165,7 @@
                 <a:ea typeface="Meiryo" pitchFamily="34" charset="-122"/>
                 <a:cs typeface="Meiryo" pitchFamily="34" charset="-120"/>
               </a:rPr>
-              <a:t>なぜ絞るのか</a:t>
+              <a:t>なぜ範囲を絞るのか</a:t>
             </a:r>
             <a:endParaRPr lang="en-US" sz="1250" dirty="0"/>
           </a:p>
@@ -23173,7 +23173,7 @@
       </p:sp>
       <p:sp>
         <p:nvSpPr>
-          <p:cNvPr id="17" name="Shape 15"/>
+          <p:cNvPr id="16" name="Shape 14"/>
           <p:cNvSpPr/>
           <p:nvPr/>
         </p:nvSpPr>
@@ -23202,53 +23202,53 @@
       </p:sp>
       <p:sp>
         <p:nvSpPr>
+          <p:cNvPr id="17" name="Text 15"/>
+          <p:cNvSpPr/>
+          <p:nvPr/>
+        </p:nvSpPr>
+        <p:spPr>
+          <a:xfrm>
+            <a:off x="822960" y="4681728"/>
+            <a:ext cx="3017520" cy="329184"/>
+          </a:xfrm>
+          <a:prstGeom prst="rect">
+            <a:avLst/>
+          </a:prstGeom>
+          <a:noFill/>
+          <a:ln/>
+        </p:spPr>
+        <p:txBody>
+          <a:bodyPr wrap="square" lIns="0" tIns="0" rIns="0" bIns="0" rtlCol="0" anchor="ctr"/>
+          <a:lstStyle/>
+          <a:p>
+            <a:pPr indent="0" marL="0">
+              <a:buNone/>
+            </a:pPr>
+            <a:r>
+              <a:rPr lang="en-US" sz="1300" b="1" dirty="0">
+                <a:solidFill>
+                  <a:srgbClr val="16233F"/>
+                </a:solidFill>
+                <a:latin typeface="Meiryo" pitchFamily="34" charset="0"/>
+                <a:ea typeface="Meiryo" pitchFamily="34" charset="-122"/>
+                <a:cs typeface="Meiryo" pitchFamily="34" charset="-120"/>
+              </a:rPr>
+              <a:t>撤退可能性の確保</a:t>
+            </a:r>
+            <a:endParaRPr lang="en-US" sz="1300" dirty="0"/>
+          </a:p>
+        </p:txBody>
+      </p:sp>
+      <p:sp>
+        <p:nvSpPr>
           <p:cNvPr id="18" name="Text 16"/>
           <p:cNvSpPr/>
           <p:nvPr/>
         </p:nvSpPr>
         <p:spPr>
           <a:xfrm>
-            <a:off x="822960" y="4700016"/>
-            <a:ext cx="3017520" cy="310896"/>
-          </a:xfrm>
-          <a:prstGeom prst="rect">
-            <a:avLst/>
-          </a:prstGeom>
-          <a:noFill/>
-          <a:ln/>
-        </p:spPr>
-        <p:txBody>
-          <a:bodyPr wrap="square" lIns="0" tIns="0" rIns="0" bIns="0" rtlCol="0" anchor="ctr"/>
-          <a:lstStyle/>
-          <a:p>
-            <a:pPr indent="0" marL="0">
-              <a:buNone/>
-            </a:pPr>
-            <a:r>
-              <a:rPr lang="en-US" sz="1300" b="1" dirty="0">
-                <a:solidFill>
-                  <a:srgbClr val="16233F"/>
-                </a:solidFill>
-                <a:latin typeface="Meiryo" pitchFamily="34" charset="0"/>
-                <a:ea typeface="Meiryo" pitchFamily="34" charset="-122"/>
-                <a:cs typeface="Meiryo" pitchFamily="34" charset="-120"/>
-              </a:rPr>
-              <a:t>撤退可能性の確保</a:t>
-            </a:r>
-            <a:endParaRPr lang="en-US" sz="1300" dirty="0"/>
-          </a:p>
-        </p:txBody>
-      </p:sp>
-      <p:sp>
-        <p:nvSpPr>
-          <p:cNvPr id="19" name="Text 17"/>
-          <p:cNvSpPr/>
-          <p:nvPr/>
-        </p:nvSpPr>
-        <p:spPr>
-          <a:xfrm>
             <a:off x="822960" y="5029200"/>
-            <a:ext cx="3017520" cy="640080"/>
+            <a:ext cx="3017520" cy="676656"/>
           </a:xfrm>
           <a:prstGeom prst="rect">
             <a:avLst/>
@@ -23283,7 +23283,7 @@
       </p:sp>
       <p:sp>
         <p:nvSpPr>
-          <p:cNvPr id="20" name="Shape 18"/>
+          <p:cNvPr id="19" name="Shape 17"/>
           <p:cNvSpPr/>
           <p:nvPr/>
         </p:nvSpPr>
@@ -23312,53 +23312,53 @@
       </p:sp>
       <p:sp>
         <p:nvSpPr>
+          <p:cNvPr id="20" name="Text 18"/>
+          <p:cNvSpPr/>
+          <p:nvPr/>
+        </p:nvSpPr>
+        <p:spPr>
+          <a:xfrm>
+            <a:off x="4695444" y="4681728"/>
+            <a:ext cx="3017520" cy="329184"/>
+          </a:xfrm>
+          <a:prstGeom prst="rect">
+            <a:avLst/>
+          </a:prstGeom>
+          <a:noFill/>
+          <a:ln/>
+        </p:spPr>
+        <p:txBody>
+          <a:bodyPr wrap="square" lIns="0" tIns="0" rIns="0" bIns="0" rtlCol="0" anchor="ctr"/>
+          <a:lstStyle/>
+          <a:p>
+            <a:pPr indent="0" marL="0">
+              <a:buNone/>
+            </a:pPr>
+            <a:r>
+              <a:rPr lang="en-US" sz="1300" b="1" dirty="0">
+                <a:solidFill>
+                  <a:srgbClr val="16233F"/>
+                </a:solidFill>
+                <a:latin typeface="Meiryo" pitchFamily="34" charset="0"/>
+                <a:ea typeface="Meiryo" pitchFamily="34" charset="-122"/>
+                <a:cs typeface="Meiryo" pitchFamily="34" charset="-120"/>
+              </a:rPr>
+              <a:t>進行中の検討と干渉しない</a:t>
+            </a:r>
+            <a:endParaRPr lang="en-US" sz="1300" dirty="0"/>
+          </a:p>
+        </p:txBody>
+      </p:sp>
+      <p:sp>
+        <p:nvSpPr>
           <p:cNvPr id="21" name="Text 19"/>
           <p:cNvSpPr/>
           <p:nvPr/>
         </p:nvSpPr>
         <p:spPr>
           <a:xfrm>
-            <a:off x="4695444" y="4700016"/>
-            <a:ext cx="3017520" cy="310896"/>
-          </a:xfrm>
-          <a:prstGeom prst="rect">
-            <a:avLst/>
-          </a:prstGeom>
-          <a:noFill/>
-          <a:ln/>
-        </p:spPr>
-        <p:txBody>
-          <a:bodyPr wrap="square" lIns="0" tIns="0" rIns="0" bIns="0" rtlCol="0" anchor="ctr"/>
-          <a:lstStyle/>
-          <a:p>
-            <a:pPr indent="0" marL="0">
-              <a:buNone/>
-            </a:pPr>
-            <a:r>
-              <a:rPr lang="en-US" sz="1300" b="1" dirty="0">
-                <a:solidFill>
-                  <a:srgbClr val="16233F"/>
-                </a:solidFill>
-                <a:latin typeface="Meiryo" pitchFamily="34" charset="0"/>
-                <a:ea typeface="Meiryo" pitchFamily="34" charset="-122"/>
-                <a:cs typeface="Meiryo" pitchFamily="34" charset="-120"/>
-              </a:rPr>
-              <a:t>移行コストの回避</a:t>
-            </a:r>
-            <a:endParaRPr lang="en-US" sz="1300" dirty="0"/>
-          </a:p>
-        </p:txBody>
-      </p:sp>
-      <p:sp>
-        <p:nvSpPr>
-          <p:cNvPr id="22" name="Text 20"/>
-          <p:cNvSpPr/>
-          <p:nvPr/>
-        </p:nvSpPr>
-        <p:spPr>
-          <a:xfrm>
             <a:off x="4695444" y="5029200"/>
-            <a:ext cx="3017520" cy="640080"/>
+            <a:ext cx="3017520" cy="676656"/>
           </a:xfrm>
           <a:prstGeom prst="rect">
             <a:avLst/>
@@ -23385,7 +23385,7 @@
                 <a:ea typeface="Meiryo" pitchFamily="34" charset="-122"/>
                 <a:cs typeface="Meiryo" pitchFamily="34" charset="-120"/>
               </a:rPr>
-              <a:t>SharePointの既存資産を移行すると、後戻りが困難になる</a:t>
+              <a:t>資料保管のルールは別軸で検討中。今回の判断がそちらを縛らないようにする</a:t>
             </a:r>
             <a:endParaRPr lang="en-US" sz="1100" dirty="0"/>
           </a:p>
@@ -23393,7 +23393,7 @@
       </p:sp>
       <p:sp>
         <p:nvSpPr>
-          <p:cNvPr id="23" name="Shape 21"/>
+          <p:cNvPr id="22" name="Shape 20"/>
           <p:cNvSpPr/>
           <p:nvPr/>
         </p:nvSpPr>
@@ -23422,53 +23422,53 @@
       </p:sp>
       <p:sp>
         <p:nvSpPr>
+          <p:cNvPr id="23" name="Text 21"/>
+          <p:cNvSpPr/>
+          <p:nvPr/>
+        </p:nvSpPr>
+        <p:spPr>
+          <a:xfrm>
+            <a:off x="8567928" y="4681728"/>
+            <a:ext cx="3017520" cy="329184"/>
+          </a:xfrm>
+          <a:prstGeom prst="rect">
+            <a:avLst/>
+          </a:prstGeom>
+          <a:noFill/>
+          <a:ln/>
+        </p:spPr>
+        <p:txBody>
+          <a:bodyPr wrap="square" lIns="0" tIns="0" rIns="0" bIns="0" rtlCol="0" anchor="ctr"/>
+          <a:lstStyle/>
+          <a:p>
+            <a:pPr indent="0" marL="0">
+              <a:buNone/>
+            </a:pPr>
+            <a:r>
+              <a:rPr lang="en-US" sz="1300" b="1" dirty="0">
+                <a:solidFill>
+                  <a:srgbClr val="16233F"/>
+                </a:solidFill>
+                <a:latin typeface="Meiryo" pitchFamily="34" charset="0"/>
+                <a:ea typeface="Meiryo" pitchFamily="34" charset="-122"/>
+                <a:cs typeface="Meiryo" pitchFamily="34" charset="-120"/>
+              </a:rPr>
+              <a:t>効果検証の明確化</a:t>
+            </a:r>
+            <a:endParaRPr lang="en-US" sz="1300" dirty="0"/>
+          </a:p>
+        </p:txBody>
+      </p:sp>
+      <p:sp>
+        <p:nvSpPr>
           <p:cNvPr id="24" name="Text 22"/>
           <p:cNvSpPr/>
           <p:nvPr/>
         </p:nvSpPr>
         <p:spPr>
           <a:xfrm>
-            <a:off x="8567928" y="4700016"/>
-            <a:ext cx="3017520" cy="310896"/>
-          </a:xfrm>
-          <a:prstGeom prst="rect">
-            <a:avLst/>
-          </a:prstGeom>
-          <a:noFill/>
-          <a:ln/>
-        </p:spPr>
-        <p:txBody>
-          <a:bodyPr wrap="square" lIns="0" tIns="0" rIns="0" bIns="0" rtlCol="0" anchor="ctr"/>
-          <a:lstStyle/>
-          <a:p>
-            <a:pPr indent="0" marL="0">
-              <a:buNone/>
-            </a:pPr>
-            <a:r>
-              <a:rPr lang="en-US" sz="1300" b="1" dirty="0">
-                <a:solidFill>
-                  <a:srgbClr val="16233F"/>
-                </a:solidFill>
-                <a:latin typeface="Meiryo" pitchFamily="34" charset="0"/>
-                <a:ea typeface="Meiryo" pitchFamily="34" charset="-122"/>
-                <a:cs typeface="Meiryo" pitchFamily="34" charset="-120"/>
-              </a:rPr>
-              <a:t>効果検証の明確化</a:t>
-            </a:r>
-            <a:endParaRPr lang="en-US" sz="1300" dirty="0"/>
-          </a:p>
-        </p:txBody>
-      </p:sp>
-      <p:sp>
-        <p:nvSpPr>
-          <p:cNvPr id="25" name="Text 23"/>
-          <p:cNvSpPr/>
-          <p:nvPr/>
-        </p:nvSpPr>
-        <p:spPr>
-          <a:xfrm>
             <a:off x="8567928" y="5029200"/>
-            <a:ext cx="3017520" cy="640080"/>
+            <a:ext cx="3017520" cy="676656"/>
           </a:xfrm>
           <a:prstGeom prst="rect">
             <a:avLst/>
@@ -25514,7 +25514,7 @@
                 <a:ea typeface="Meiryo" pitchFamily="34" charset="-122"/>
                 <a:cs typeface="Meiryo" pitchFamily="34" charset="-120"/>
               </a:rPr>
-              <a:t>年間費用 529.2万円 のご承認（Business・年払い）</a:t>
+              <a:t>年間費用 529.2万円（税別）のご承認（Business・年払い）</a:t>
             </a:r>
             <a:endParaRPr lang="en-US" sz="1700" dirty="0"/>
           </a:p>
@@ -30728,7 +30728,7 @@
                 <a:ea typeface="Meiryo" pitchFamily="34" charset="-122"/>
                 <a:cs typeface="Meiryo" pitchFamily="34" charset="-120"/>
               </a:rPr>
-              <a:t>目的が曖昧な会議に、年間約6,600万円を投じています</a:t>
+              <a:t>目的が曖昧な会議に、年間約4,700万円を投じています</a:t>
             </a:r>
             <a:endParaRPr lang="en-US" sz="2700" dirty="0"/>
           </a:p>
@@ -30933,7 +30933,7 @@
                 <a:ea typeface="Meiryo" pitchFamily="34" charset="-122"/>
                 <a:cs typeface="Meiryo" pitchFamily="34" charset="-120"/>
               </a:rPr>
-              <a:t>うち目的が曖昧なもの（35%）</a:t>
+              <a:t>うち目的が曖昧なもの（25%）</a:t>
             </a:r>
             <a:endParaRPr lang="en-US" sz="1200" dirty="0"/>
           </a:p>
@@ -30972,7 +30972,7 @@
                 <a:ea typeface="Meiryo" pitchFamily="34" charset="-122"/>
                 <a:cs typeface="Meiryo" pitchFamily="34" charset="-120"/>
               </a:rPr>
-              <a:t>約6,600万円</a:t>
+              <a:t>約4,700万円</a:t>
             </a:r>
             <a:endParaRPr lang="en-US" sz="2700" dirty="0"/>
           </a:p>
@@ -31621,8 +31621,8 @@
         </p:nvSpPr>
         <p:spPr>
           <a:xfrm>
-            <a:off x="566928" y="3950208"/>
-            <a:ext cx="5029200" cy="548640"/>
+            <a:off x="566928" y="3913632"/>
+            <a:ext cx="5029200" cy="603504"/>
           </a:xfrm>
           <a:prstGeom prst="rect">
             <a:avLst/>
@@ -31649,7 +31649,7 @@
                 <a:ea typeface="Meiryo" pitchFamily="34" charset="-122"/>
                 <a:cs typeface="Meiryo" pitchFamily="34" charset="-120"/>
               </a:rPr>
-              <a:t>※ リーダー層の週15時間は実測にもとづく値。MG以上・一般社員は仮置きのため、実測値で更新が必要</a:t>
+              <a:t>※ 会議時間は各階層へのヒアリングにもとづく概算です。厳密な集計は行っていないため、規模感としてご覧ください。</a:t>
             </a:r>
             <a:endParaRPr lang="en-US" sz="1000" dirty="0"/>
           </a:p>
